--- a/assets/figures-editable/c3-c4/c4-e33.pptx
+++ b/assets/figures-editable/c3-c4/c4-e33.pptx
@@ -3104,8 +3104,8 @@
         </p:nvSpPr>
         <p:spPr>
           <a:xfrm>
-            <a:off x="274320" y="137160"/>
-            <a:ext cx="11612880" cy="365760"/>
+            <a:off x="274320" y="118872"/>
+            <a:ext cx="11612880" cy="340105"/>
           </a:xfrm>
           <a:prstGeom prst="rect">
             <a:avLst/>
@@ -3114,7 +3114,7 @@
           <a:effectLst/>
         </p:spPr>
         <p:txBody>
-          <a:bodyPr wrap="square" lIns="27432" rIns="27432" tIns="18288" bIns="18288" anchor="ctr">
+          <a:bodyPr wrap="none" lIns="18288" rIns="18288" tIns="18288" bIns="18288" anchor="t">
             <a:spAutoFit/>
           </a:bodyPr>
           <a:lstStyle/>
@@ -3125,7 +3125,7 @@
               </a:spcAft>
             </a:pPr>
             <a:r>
-              <a:rPr sz="2100" b="0" i="0">
+              <a:rPr sz="1900" b="1" i="0">
                 <a:solidFill>
                   <a:srgbClr val="8EDBD4"/>
                 </a:solidFill>
@@ -3138,21 +3138,58 @@
       </p:sp>
       <p:sp>
         <p:nvSpPr>
-          <p:cNvPr id="3" name="C4-E33 rect 1" descr="sci-ppt:o001"/>
-          <p:cNvSpPr/>
+          <p:cNvPr id="3" name="C4-E33 text 1" descr="sci-ppt:o001"/>
+          <p:cNvSpPr txBox="1"/>
           <p:nvPr/>
         </p:nvSpPr>
         <p:spPr>
           <a:xfrm>
-            <a:off x="594360" y="1417320"/>
-            <a:ext cx="3200400" cy="1325880"/>
+            <a:off x="457200" y="914400"/>
+            <a:ext cx="11247120" cy="254889"/>
           </a:xfrm>
           <a:prstGeom prst="rect">
             <a:avLst/>
           </a:prstGeom>
-          <a:solidFill>
-            <a:srgbClr val="213E4B"/>
-          </a:solidFill>
+          <a:noFill/>
+          <a:effectLst/>
+        </p:spPr>
+        <p:txBody>
+          <a:bodyPr wrap="none" lIns="18288" rIns="18288" tIns="18288" bIns="18288" anchor="t">
+            <a:spAutoFit/>
+          </a:bodyPr>
+          <a:lstStyle/>
+          <a:p>
+            <a:pPr algn="l">
+              <a:spcAft>
+                <a:spcPts val="0"/>
+              </a:spcAft>
+            </a:pPr>
+            <a:r>
+              <a:rPr sz="1350" b="1" i="0">
+                <a:solidFill>
+                  <a:srgbClr val="8EDBD4"/>
+                </a:solidFill>
+                <a:latin typeface="Arial"/>
+              </a:rPr>
+              <a:t>Do the energy and momentum budgets describe the same motion?</a:t>
+            </a:r>
+          </a:p>
+        </p:txBody>
+      </p:sp>
+      <p:cxnSp>
+        <p:nvCxnSpPr>
+          <p:cNvPr id="4" name="C4-E33 line 2" descr="sci-ppt:o002"/>
+          <p:cNvCxnSpPr/>
+          <p:nvPr/>
+        </p:nvCxnSpPr>
+        <p:spPr>
+          <a:xfrm>
+            <a:off x="914400" y="4846320"/>
+            <a:ext cx="5852160" cy="0"/>
+          </a:xfrm>
+          <a:prstGeom prst="line">
+            <a:avLst/>
+          </a:prstGeom>
           <a:ln w="19050">
             <a:solidFill>
               <a:srgbClr val="B4C7D2"/>
@@ -3160,95 +3197,21 @@
           </a:ln>
           <a:effectLst/>
         </p:spPr>
-        <p:txBody>
-          <a:bodyPr rtlCol="0" anchor="ctr"/>
-          <a:lstStyle/>
-          <a:p>
-            <a:pPr algn="ctr"/>
-          </a:p>
-        </p:txBody>
-      </p:sp>
-      <p:sp>
-        <p:nvSpPr>
-          <p:cNvPr id="4" name="C4-E33 text 2" descr="sci-ppt:o002"/>
-          <p:cNvSpPr txBox="1"/>
-          <p:nvPr/>
-        </p:nvSpPr>
-        <p:spPr>
-          <a:xfrm>
-            <a:off x="758952" y="1627632"/>
-            <a:ext cx="2871216" cy="914400"/>
-          </a:xfrm>
-          <a:prstGeom prst="rect">
-            <a:avLst/>
-          </a:prstGeom>
-          <a:noFill/>
-          <a:effectLst/>
-        </p:spPr>
-        <p:txBody>
-          <a:bodyPr wrap="square" lIns="27432" rIns="27432" tIns="18288" bIns="18288" anchor="ctr">
-            <a:spAutoFit/>
-          </a:bodyPr>
-          <a:lstStyle/>
-          <a:p>
-            <a:pPr algn="l">
-              <a:spcAft>
-                <a:spcPts val="0"/>
-              </a:spcAft>
-            </a:pPr>
-            <a:r>
-              <a:rPr sz="1800" b="0" i="0">
-                <a:solidFill>
-                  <a:srgbClr val="E7F0F3"/>
-                </a:solidFill>
-                <a:latin typeface="Arial"/>
-              </a:rPr>
-              <a:t>Incoming finite budgets</a:t>
-            </a:r>
-          </a:p>
-        </p:txBody>
-      </p:sp>
+      </p:cxnSp>
       <p:cxnSp>
         <p:nvCxnSpPr>
-          <p:cNvPr id="5" name="C4-E33 arrow 3" descr="sci-ppt:o003"/>
+          <p:cNvPr id="5" name="C4-E33 line 3" descr="sci-ppt:o003"/>
           <p:cNvCxnSpPr/>
           <p:nvPr/>
         </p:nvCxnSpPr>
         <p:spPr>
           <a:xfrm>
-            <a:off x="3794760" y="2057400"/>
-            <a:ext cx="640080" cy="0"/>
+            <a:off x="914400" y="1828800"/>
+            <a:ext cx="0" cy="3017520"/>
           </a:xfrm>
           <a:prstGeom prst="line">
             <a:avLst/>
           </a:prstGeom>
-          <a:ln w="25400">
-            <a:solidFill>
-              <a:srgbClr val="8EDBD4"/>
-            </a:solidFill>
-            <a:headEnd type="none" w="med" len="med"/>
-            <a:tailEnd type="triangle" w="med" len="med"/>
-          </a:ln>
-          <a:effectLst/>
-        </p:spPr>
-      </p:cxnSp>
-      <p:sp>
-        <p:nvSpPr>
-          <p:cNvPr id="6" name="C4-E33 rect 4" descr="sci-ppt:o004"/>
-          <p:cNvSpPr/>
-          <p:nvPr/>
-        </p:nvSpPr>
-        <p:spPr>
-          <a:xfrm>
-            <a:off x="4480560" y="1417320"/>
-            <a:ext cx="3200400" cy="1325880"/>
-          </a:xfrm>
-          <a:prstGeom prst="rect">
-            <a:avLst/>
-          </a:prstGeom>
-          <a:solidFill>
-            <a:srgbClr val="213E4B"/>
-          </a:solidFill>
           <a:ln w="19050">
             <a:solidFill>
               <a:srgbClr val="B4C7D2"/>
@@ -3256,24 +3219,61 @@
           </a:ln>
           <a:effectLst/>
         </p:spPr>
-        <p:txBody>
-          <a:bodyPr rtlCol="0" anchor="ctr"/>
-          <a:lstStyle/>
-          <a:p>
-            <a:pPr algn="ctr"/>
-          </a:p>
-        </p:txBody>
-      </p:sp>
-      <p:sp>
-        <p:nvSpPr>
-          <p:cNvPr id="7" name="C4-E33 text 5" descr="sci-ppt:o005"/>
+      </p:cxnSp>
+      <p:cxnSp>
+        <p:nvCxnSpPr>
+          <p:cNvPr id="6" name="C4-E33 line 4" descr="sci-ppt:o004"/>
+          <p:cNvCxnSpPr/>
+          <p:nvPr/>
+        </p:nvCxnSpPr>
+        <p:spPr>
+          <a:xfrm>
+            <a:off x="914400" y="4846320"/>
+            <a:ext cx="0" cy="64008"/>
+          </a:xfrm>
+          <a:prstGeom prst="line">
+            <a:avLst/>
+          </a:prstGeom>
+          <a:ln w="12700">
+            <a:solidFill>
+              <a:srgbClr val="B4C7D2"/>
+            </a:solidFill>
+          </a:ln>
+          <a:effectLst/>
+        </p:spPr>
+      </p:cxnSp>
+      <p:cxnSp>
+        <p:nvCxnSpPr>
+          <p:cNvPr id="7" name="C4-E33 line 5" descr="sci-ppt:o005"/>
+          <p:cNvCxnSpPr/>
+          <p:nvPr/>
+        </p:nvCxnSpPr>
+        <p:spPr>
+          <a:xfrm>
+            <a:off x="914400" y="1828800"/>
+            <a:ext cx="0" cy="3017520"/>
+          </a:xfrm>
+          <a:prstGeom prst="line">
+            <a:avLst/>
+          </a:prstGeom>
+          <a:ln w="7620">
+            <a:solidFill>
+              <a:srgbClr val="2E4756"/>
+            </a:solidFill>
+          </a:ln>
+          <a:effectLst/>
+        </p:spPr>
+      </p:cxnSp>
+      <p:sp>
+        <p:nvSpPr>
+          <p:cNvPr id="8" name="C4-E33 text 6" descr="sci-ppt:o006"/>
           <p:cNvSpPr txBox="1"/>
           <p:nvPr/>
         </p:nvSpPr>
         <p:spPr>
           <a:xfrm>
-            <a:off x="4645152" y="1627632"/>
-            <a:ext cx="2871216" cy="914400"/>
+            <a:off x="457200" y="4928616"/>
+            <a:ext cx="914400" cy="208407"/>
           </a:xfrm>
           <a:prstGeom prst="rect">
             <a:avLst/>
@@ -3282,94 +3282,82 @@
           <a:effectLst/>
         </p:spPr>
         <p:txBody>
-          <a:bodyPr wrap="square" lIns="27432" rIns="27432" tIns="18288" bIns="18288" anchor="ctr">
+          <a:bodyPr wrap="none" lIns="18288" rIns="18288" tIns="18288" bIns="18288" anchor="t">
             <a:spAutoFit/>
           </a:bodyPr>
           <a:lstStyle/>
           <a:p>
-            <a:pPr algn="l">
+            <a:pPr algn="ctr">
               <a:spcAft>
                 <a:spcPts val="0"/>
               </a:spcAft>
             </a:pPr>
             <a:r>
-              <a:rPr sz="1800" b="0" i="0">
+              <a:rPr sz="1050" b="0" i="0">
                 <a:solidFill>
-                  <a:srgbClr val="E7F0F3"/>
+                  <a:srgbClr val="B4C7D2"/>
                 </a:solidFill>
                 <a:latin typeface="Arial"/>
               </a:rPr>
-              <a:t>Transmitted E_solid, I_net</a:t>
+              <a:t>0.0</a:t>
             </a:r>
           </a:p>
         </p:txBody>
       </p:sp>
       <p:cxnSp>
         <p:nvCxnSpPr>
-          <p:cNvPr id="8" name="C4-E33 arrow 6" descr="sci-ppt:o006"/>
+          <p:cNvPr id="9" name="C4-E33 line 7" descr="sci-ppt:o007"/>
           <p:cNvCxnSpPr/>
           <p:nvPr/>
         </p:nvCxnSpPr>
         <p:spPr>
           <a:xfrm>
-            <a:off x="7680960" y="2057400"/>
-            <a:ext cx="640080" cy="0"/>
+            <a:off x="2377440" y="4846320"/>
+            <a:ext cx="0" cy="64008"/>
           </a:xfrm>
           <a:prstGeom prst="line">
             <a:avLst/>
           </a:prstGeom>
-          <a:ln w="25400">
-            <a:solidFill>
-              <a:srgbClr val="8EDBD4"/>
-            </a:solidFill>
-            <a:headEnd type="none" w="med" len="med"/>
-            <a:tailEnd type="triangle" w="med" len="med"/>
-          </a:ln>
-          <a:effectLst/>
-        </p:spPr>
-      </p:cxnSp>
-      <p:sp>
-        <p:nvSpPr>
-          <p:cNvPr id="9" name="C4-E33 rect 7" descr="sci-ppt:o007"/>
-          <p:cNvSpPr/>
-          <p:nvPr/>
-        </p:nvSpPr>
-        <p:spPr>
-          <a:xfrm>
-            <a:off x="8366760" y="1417320"/>
-            <a:ext cx="3200400" cy="1325880"/>
-          </a:xfrm>
-          <a:prstGeom prst="rect">
-            <a:avLst/>
-          </a:prstGeom>
-          <a:solidFill>
-            <a:srgbClr val="213E4B"/>
-          </a:solidFill>
-          <a:ln w="19050">
+          <a:ln w="12700">
             <a:solidFill>
               <a:srgbClr val="B4C7D2"/>
             </a:solidFill>
           </a:ln>
           <a:effectLst/>
         </p:spPr>
-        <p:txBody>
-          <a:bodyPr rtlCol="0" anchor="ctr"/>
-          <a:lstStyle/>
-          <a:p>
-            <a:pPr algn="ctr"/>
-          </a:p>
-        </p:txBody>
-      </p:sp>
-      <p:sp>
-        <p:nvSpPr>
-          <p:cNvPr id="10" name="C4-E33 text 8" descr="sci-ppt:o008"/>
+      </p:cxnSp>
+      <p:cxnSp>
+        <p:nvCxnSpPr>
+          <p:cNvPr id="10" name="C4-E33 line 8" descr="sci-ppt:o008"/>
+          <p:cNvCxnSpPr/>
+          <p:nvPr/>
+        </p:nvCxnSpPr>
+        <p:spPr>
+          <a:xfrm>
+            <a:off x="2377440" y="1828800"/>
+            <a:ext cx="0" cy="3017520"/>
+          </a:xfrm>
+          <a:prstGeom prst="line">
+            <a:avLst/>
+          </a:prstGeom>
+          <a:ln w="7620">
+            <a:solidFill>
+              <a:srgbClr val="2E4756"/>
+            </a:solidFill>
+          </a:ln>
+          <a:effectLst/>
+        </p:spPr>
+      </p:cxnSp>
+      <p:sp>
+        <p:nvSpPr>
+          <p:cNvPr id="11" name="C4-E33 text 9" descr="sci-ppt:o009"/>
           <p:cNvSpPr txBox="1"/>
           <p:nvPr/>
         </p:nvSpPr>
         <p:spPr>
           <a:xfrm>
-            <a:off x="8531352" y="1627632"/>
-            <a:ext cx="2871216" cy="914400"/>
+            <a:off x="1920240" y="4928616"/>
+            <a:ext cx="914400" cy="208407"/>
           </a:xfrm>
           <a:prstGeom prst="rect">
             <a:avLst/>
@@ -3378,64 +3366,24 @@
           <a:effectLst/>
         </p:spPr>
         <p:txBody>
-          <a:bodyPr wrap="square" lIns="27432" rIns="27432" tIns="18288" bIns="18288" anchor="ctr">
+          <a:bodyPr wrap="none" lIns="18288" rIns="18288" tIns="18288" bIns="18288" anchor="t">
             <a:spAutoFit/>
           </a:bodyPr>
           <a:lstStyle/>
           <a:p>
-            <a:pPr algn="l">
+            <a:pPr algn="ctr">
               <a:spcAft>
                 <a:spcPts val="0"/>
               </a:spcAft>
             </a:pPr>
             <a:r>
-              <a:rPr sz="1800" b="0" i="0">
+              <a:rPr sz="1050" b="0" i="0">
                 <a:solidFill>
-                  <a:srgbClr val="E7F0F3"/>
+                  <a:srgbClr val="B4C7D2"/>
                 </a:solidFill>
                 <a:latin typeface="Arial"/>
               </a:rPr>
-              <a:t>Release + departure cost</a:t>
-            </a:r>
-          </a:p>
-        </p:txBody>
-      </p:sp>
-      <p:sp>
-        <p:nvSpPr>
-          <p:cNvPr id="11" name="C4-E33 text 9" descr="sci-ppt:o009"/>
-          <p:cNvSpPr txBox="1"/>
-          <p:nvPr/>
-        </p:nvSpPr>
-        <p:spPr>
-          <a:xfrm>
-            <a:off x="731520" y="3246120"/>
-            <a:ext cx="10789920" cy="457200"/>
-          </a:xfrm>
-          <a:prstGeom prst="rect">
-            <a:avLst/>
-          </a:prstGeom>
-          <a:noFill/>
-          <a:effectLst/>
-        </p:spPr>
-        <p:txBody>
-          <a:bodyPr wrap="square" lIns="27432" rIns="27432" tIns="18288" bIns="18288" anchor="ctr">
-            <a:spAutoFit/>
-          </a:bodyPr>
-          <a:lstStyle/>
-          <a:p>
-            <a:pPr algn="l">
-              <a:spcAft>
-                <a:spcPts val="0"/>
-              </a:spcAft>
-            </a:pPr>
-            <a:r>
-              <a:rPr sz="1800" b="0" i="0">
-                <a:solidFill>
-                  <a:srgbClr val="8EDBD4"/>
-                </a:solidFill>
-                <a:latin typeface="Arial"/>
-              </a:rPr>
-              <a:t>Work, storage, fracture consumption and net impulse retain separate meanings.</a:t>
+              <a:t>0.3</a:t>
             </a:r>
           </a:p>
         </p:txBody>
@@ -3448,30 +3396,52 @@
         </p:nvCxnSpPr>
         <p:spPr>
           <a:xfrm>
-            <a:off x="274320" y="3977639"/>
-            <a:ext cx="11612880" cy="0"/>
+            <a:off x="3840480" y="4846320"/>
+            <a:ext cx="0" cy="64008"/>
           </a:xfrm>
           <a:prstGeom prst="line">
             <a:avLst/>
           </a:prstGeom>
           <a:ln w="12700">
             <a:solidFill>
-              <a:srgbClr val="405967"/>
+              <a:srgbClr val="B4C7D2"/>
             </a:solidFill>
           </a:ln>
           <a:effectLst/>
         </p:spPr>
       </p:cxnSp>
-      <p:sp>
-        <p:nvSpPr>
-          <p:cNvPr id="13" name="C4-E33 text 11" descr="sci-ppt:o011"/>
+      <p:cxnSp>
+        <p:nvCxnSpPr>
+          <p:cNvPr id="13" name="C4-E33 line 11" descr="sci-ppt:o011"/>
+          <p:cNvCxnSpPr/>
+          <p:nvPr/>
+        </p:nvCxnSpPr>
+        <p:spPr>
+          <a:xfrm>
+            <a:off x="3840480" y="1828800"/>
+            <a:ext cx="0" cy="3017520"/>
+          </a:xfrm>
+          <a:prstGeom prst="line">
+            <a:avLst/>
+          </a:prstGeom>
+          <a:ln w="7620">
+            <a:solidFill>
+              <a:srgbClr val="2E4756"/>
+            </a:solidFill>
+          </a:ln>
+          <a:effectLst/>
+        </p:spPr>
+      </p:cxnSp>
+      <p:sp>
+        <p:nvSpPr>
+          <p:cNvPr id="14" name="C4-E33 text 12" descr="sci-ppt:o012"/>
           <p:cNvSpPr txBox="1"/>
           <p:nvPr/>
         </p:nvSpPr>
         <p:spPr>
           <a:xfrm>
-            <a:off x="320040" y="4096512"/>
-            <a:ext cx="5715000" cy="246888"/>
+            <a:off x="3383280" y="4928616"/>
+            <a:ext cx="914400" cy="208407"/>
           </a:xfrm>
           <a:prstGeom prst="rect">
             <a:avLst/>
@@ -3480,7 +3450,445 @@
           <a:effectLst/>
         </p:spPr>
         <p:txBody>
-          <a:bodyPr wrap="square" lIns="27432" rIns="27432" tIns="18288" bIns="18288" anchor="ctr">
+          <a:bodyPr wrap="none" lIns="18288" rIns="18288" tIns="18288" bIns="18288" anchor="t">
+            <a:spAutoFit/>
+          </a:bodyPr>
+          <a:lstStyle/>
+          <a:p>
+            <a:pPr algn="ctr">
+              <a:spcAft>
+                <a:spcPts val="0"/>
+              </a:spcAft>
+            </a:pPr>
+            <a:r>
+              <a:rPr sz="1050" b="0" i="0">
+                <a:solidFill>
+                  <a:srgbClr val="B4C7D2"/>
+                </a:solidFill>
+                <a:latin typeface="Arial"/>
+              </a:rPr>
+              <a:t>0.6</a:t>
+            </a:r>
+          </a:p>
+        </p:txBody>
+      </p:sp>
+      <p:cxnSp>
+        <p:nvCxnSpPr>
+          <p:cNvPr id="15" name="C4-E33 line 13" descr="sci-ppt:o013"/>
+          <p:cNvCxnSpPr/>
+          <p:nvPr/>
+        </p:nvCxnSpPr>
+        <p:spPr>
+          <a:xfrm>
+            <a:off x="5303520" y="4846320"/>
+            <a:ext cx="0" cy="64008"/>
+          </a:xfrm>
+          <a:prstGeom prst="line">
+            <a:avLst/>
+          </a:prstGeom>
+          <a:ln w="12700">
+            <a:solidFill>
+              <a:srgbClr val="B4C7D2"/>
+            </a:solidFill>
+          </a:ln>
+          <a:effectLst/>
+        </p:spPr>
+      </p:cxnSp>
+      <p:cxnSp>
+        <p:nvCxnSpPr>
+          <p:cNvPr id="16" name="C4-E33 line 14" descr="sci-ppt:o014"/>
+          <p:cNvCxnSpPr/>
+          <p:nvPr/>
+        </p:nvCxnSpPr>
+        <p:spPr>
+          <a:xfrm>
+            <a:off x="5303520" y="1828800"/>
+            <a:ext cx="0" cy="3017520"/>
+          </a:xfrm>
+          <a:prstGeom prst="line">
+            <a:avLst/>
+          </a:prstGeom>
+          <a:ln w="7620">
+            <a:solidFill>
+              <a:srgbClr val="2E4756"/>
+            </a:solidFill>
+          </a:ln>
+          <a:effectLst/>
+        </p:spPr>
+      </p:cxnSp>
+      <p:sp>
+        <p:nvSpPr>
+          <p:cNvPr id="17" name="C4-E33 text 15" descr="sci-ppt:o015"/>
+          <p:cNvSpPr txBox="1"/>
+          <p:nvPr/>
+        </p:nvSpPr>
+        <p:spPr>
+          <a:xfrm>
+            <a:off x="4846320" y="4928616"/>
+            <a:ext cx="914400" cy="208407"/>
+          </a:xfrm>
+          <a:prstGeom prst="rect">
+            <a:avLst/>
+          </a:prstGeom>
+          <a:noFill/>
+          <a:effectLst/>
+        </p:spPr>
+        <p:txBody>
+          <a:bodyPr wrap="none" lIns="18288" rIns="18288" tIns="18288" bIns="18288" anchor="t">
+            <a:spAutoFit/>
+          </a:bodyPr>
+          <a:lstStyle/>
+          <a:p>
+            <a:pPr algn="ctr">
+              <a:spcAft>
+                <a:spcPts val="0"/>
+              </a:spcAft>
+            </a:pPr>
+            <a:r>
+              <a:rPr sz="1050" b="0" i="0">
+                <a:solidFill>
+                  <a:srgbClr val="B4C7D2"/>
+                </a:solidFill>
+                <a:latin typeface="Arial"/>
+              </a:rPr>
+              <a:t>0.9</a:t>
+            </a:r>
+          </a:p>
+        </p:txBody>
+      </p:sp>
+      <p:cxnSp>
+        <p:nvCxnSpPr>
+          <p:cNvPr id="18" name="C4-E33 line 16" descr="sci-ppt:o016"/>
+          <p:cNvCxnSpPr/>
+          <p:nvPr/>
+        </p:nvCxnSpPr>
+        <p:spPr>
+          <a:xfrm>
+            <a:off x="6766560" y="4846320"/>
+            <a:ext cx="0" cy="64008"/>
+          </a:xfrm>
+          <a:prstGeom prst="line">
+            <a:avLst/>
+          </a:prstGeom>
+          <a:ln w="12700">
+            <a:solidFill>
+              <a:srgbClr val="B4C7D2"/>
+            </a:solidFill>
+          </a:ln>
+          <a:effectLst/>
+        </p:spPr>
+      </p:cxnSp>
+      <p:cxnSp>
+        <p:nvCxnSpPr>
+          <p:cNvPr id="19" name="C4-E33 line 17" descr="sci-ppt:o017"/>
+          <p:cNvCxnSpPr/>
+          <p:nvPr/>
+        </p:nvCxnSpPr>
+        <p:spPr>
+          <a:xfrm>
+            <a:off x="6766560" y="1828800"/>
+            <a:ext cx="0" cy="3017520"/>
+          </a:xfrm>
+          <a:prstGeom prst="line">
+            <a:avLst/>
+          </a:prstGeom>
+          <a:ln w="7620">
+            <a:solidFill>
+              <a:srgbClr val="2E4756"/>
+            </a:solidFill>
+          </a:ln>
+          <a:effectLst/>
+        </p:spPr>
+      </p:cxnSp>
+      <p:sp>
+        <p:nvSpPr>
+          <p:cNvPr id="20" name="C4-E33 text 18" descr="sci-ppt:o018"/>
+          <p:cNvSpPr txBox="1"/>
+          <p:nvPr/>
+        </p:nvSpPr>
+        <p:spPr>
+          <a:xfrm>
+            <a:off x="6309360" y="4928616"/>
+            <a:ext cx="914400" cy="208407"/>
+          </a:xfrm>
+          <a:prstGeom prst="rect">
+            <a:avLst/>
+          </a:prstGeom>
+          <a:noFill/>
+          <a:effectLst/>
+        </p:spPr>
+        <p:txBody>
+          <a:bodyPr wrap="none" lIns="18288" rIns="18288" tIns="18288" bIns="18288" anchor="t">
+            <a:spAutoFit/>
+          </a:bodyPr>
+          <a:lstStyle/>
+          <a:p>
+            <a:pPr algn="ctr">
+              <a:spcAft>
+                <a:spcPts val="0"/>
+              </a:spcAft>
+            </a:pPr>
+            <a:r>
+              <a:rPr sz="1050" b="0" i="0">
+                <a:solidFill>
+                  <a:srgbClr val="B4C7D2"/>
+                </a:solidFill>
+                <a:latin typeface="Arial"/>
+              </a:rPr>
+              <a:t>1.2</a:t>
+            </a:r>
+          </a:p>
+        </p:txBody>
+      </p:sp>
+      <p:cxnSp>
+        <p:nvCxnSpPr>
+          <p:cNvPr id="21" name="C4-E33 line 19" descr="sci-ppt:o019"/>
+          <p:cNvCxnSpPr/>
+          <p:nvPr/>
+        </p:nvCxnSpPr>
+        <p:spPr>
+          <a:xfrm>
+            <a:off x="850392" y="4846320"/>
+            <a:ext cx="64008" cy="0"/>
+          </a:xfrm>
+          <a:prstGeom prst="line">
+            <a:avLst/>
+          </a:prstGeom>
+          <a:ln w="12700">
+            <a:solidFill>
+              <a:srgbClr val="B4C7D2"/>
+            </a:solidFill>
+          </a:ln>
+          <a:effectLst/>
+        </p:spPr>
+      </p:cxnSp>
+      <p:cxnSp>
+        <p:nvCxnSpPr>
+          <p:cNvPr id="22" name="C4-E33 line 20" descr="sci-ppt:o020"/>
+          <p:cNvCxnSpPr/>
+          <p:nvPr/>
+        </p:nvCxnSpPr>
+        <p:spPr>
+          <a:xfrm>
+            <a:off x="850392" y="3589020"/>
+            <a:ext cx="64008" cy="0"/>
+          </a:xfrm>
+          <a:prstGeom prst="line">
+            <a:avLst/>
+          </a:prstGeom>
+          <a:ln w="12700">
+            <a:solidFill>
+              <a:srgbClr val="B4C7D2"/>
+            </a:solidFill>
+          </a:ln>
+          <a:effectLst/>
+        </p:spPr>
+      </p:cxnSp>
+      <p:cxnSp>
+        <p:nvCxnSpPr>
+          <p:cNvPr id="23" name="C4-E33 line 21" descr="sci-ppt:o021"/>
+          <p:cNvCxnSpPr/>
+          <p:nvPr/>
+        </p:nvCxnSpPr>
+        <p:spPr>
+          <a:xfrm>
+            <a:off x="914400" y="3589020"/>
+            <a:ext cx="5852160" cy="0"/>
+          </a:xfrm>
+          <a:prstGeom prst="line">
+            <a:avLst/>
+          </a:prstGeom>
+          <a:ln w="7620">
+            <a:solidFill>
+              <a:srgbClr val="2E4756"/>
+            </a:solidFill>
+          </a:ln>
+          <a:effectLst/>
+        </p:spPr>
+      </p:cxnSp>
+      <p:sp>
+        <p:nvSpPr>
+          <p:cNvPr id="24" name="C4-E33 text 22" descr="sci-ppt:o022"/>
+          <p:cNvSpPr txBox="1"/>
+          <p:nvPr/>
+        </p:nvSpPr>
+        <p:spPr>
+          <a:xfrm>
+            <a:off x="45720" y="3506724"/>
+            <a:ext cx="777240" cy="208407"/>
+          </a:xfrm>
+          <a:prstGeom prst="rect">
+            <a:avLst/>
+          </a:prstGeom>
+          <a:noFill/>
+          <a:effectLst/>
+        </p:spPr>
+        <p:txBody>
+          <a:bodyPr wrap="none" lIns="18288" rIns="18288" tIns="18288" bIns="18288" anchor="t">
+            <a:spAutoFit/>
+          </a:bodyPr>
+          <a:lstStyle/>
+          <a:p>
+            <a:pPr algn="r">
+              <a:spcAft>
+                <a:spcPts val="0"/>
+              </a:spcAft>
+            </a:pPr>
+            <a:r>
+              <a:rPr sz="1050" b="0" i="0">
+                <a:solidFill>
+                  <a:srgbClr val="B4C7D2"/>
+                </a:solidFill>
+                <a:latin typeface="Arial"/>
+              </a:rPr>
+              <a:t>5</a:t>
+            </a:r>
+          </a:p>
+        </p:txBody>
+      </p:sp>
+      <p:cxnSp>
+        <p:nvCxnSpPr>
+          <p:cNvPr id="25" name="C4-E33 line 23" descr="sci-ppt:o023"/>
+          <p:cNvCxnSpPr/>
+          <p:nvPr/>
+        </p:nvCxnSpPr>
+        <p:spPr>
+          <a:xfrm>
+            <a:off x="850392" y="2331720"/>
+            <a:ext cx="64008" cy="0"/>
+          </a:xfrm>
+          <a:prstGeom prst="line">
+            <a:avLst/>
+          </a:prstGeom>
+          <a:ln w="12700">
+            <a:solidFill>
+              <a:srgbClr val="B4C7D2"/>
+            </a:solidFill>
+          </a:ln>
+          <a:effectLst/>
+        </p:spPr>
+      </p:cxnSp>
+      <p:cxnSp>
+        <p:nvCxnSpPr>
+          <p:cNvPr id="26" name="C4-E33 line 24" descr="sci-ppt:o024"/>
+          <p:cNvCxnSpPr/>
+          <p:nvPr/>
+        </p:nvCxnSpPr>
+        <p:spPr>
+          <a:xfrm>
+            <a:off x="914400" y="2331720"/>
+            <a:ext cx="5852160" cy="0"/>
+          </a:xfrm>
+          <a:prstGeom prst="line">
+            <a:avLst/>
+          </a:prstGeom>
+          <a:ln w="7620">
+            <a:solidFill>
+              <a:srgbClr val="2E4756"/>
+            </a:solidFill>
+          </a:ln>
+          <a:effectLst/>
+        </p:spPr>
+      </p:cxnSp>
+      <p:sp>
+        <p:nvSpPr>
+          <p:cNvPr id="27" name="C4-E33 text 25" descr="sci-ppt:o025"/>
+          <p:cNvSpPr txBox="1"/>
+          <p:nvPr/>
+        </p:nvSpPr>
+        <p:spPr>
+          <a:xfrm>
+            <a:off x="45720" y="2249424"/>
+            <a:ext cx="777240" cy="208407"/>
+          </a:xfrm>
+          <a:prstGeom prst="rect">
+            <a:avLst/>
+          </a:prstGeom>
+          <a:noFill/>
+          <a:effectLst/>
+        </p:spPr>
+        <p:txBody>
+          <a:bodyPr wrap="none" lIns="18288" rIns="18288" tIns="18288" bIns="18288" anchor="t">
+            <a:spAutoFit/>
+          </a:bodyPr>
+          <a:lstStyle/>
+          <a:p>
+            <a:pPr algn="r">
+              <a:spcAft>
+                <a:spcPts val="0"/>
+              </a:spcAft>
+            </a:pPr>
+            <a:r>
+              <a:rPr sz="1050" b="0" i="0">
+                <a:solidFill>
+                  <a:srgbClr val="B4C7D2"/>
+                </a:solidFill>
+                <a:latin typeface="Arial"/>
+              </a:rPr>
+              <a:t>10</a:t>
+            </a:r>
+          </a:p>
+        </p:txBody>
+      </p:sp>
+      <p:sp>
+        <p:nvSpPr>
+          <p:cNvPr id="28" name="C4-E33 text 26" descr="sci-ppt:o026"/>
+          <p:cNvSpPr txBox="1"/>
+          <p:nvPr/>
+        </p:nvSpPr>
+        <p:spPr>
+          <a:xfrm>
+            <a:off x="914400" y="5129783"/>
+            <a:ext cx="5852160" cy="231648"/>
+          </a:xfrm>
+          <a:prstGeom prst="rect">
+            <a:avLst/>
+          </a:prstGeom>
+          <a:noFill/>
+          <a:effectLst/>
+        </p:spPr>
+        <p:txBody>
+          <a:bodyPr wrap="none" lIns="18288" rIns="18288" tIns="18288" bIns="18288" anchor="t">
+            <a:spAutoFit/>
+          </a:bodyPr>
+          <a:lstStyle/>
+          <a:p>
+            <a:pPr algn="ctr">
+              <a:spcAft>
+                <a:spcPts val="0"/>
+              </a:spcAft>
+            </a:pPr>
+            <a:r>
+              <a:rPr sz="1200" b="0" i="0">
+                <a:solidFill>
+                  <a:srgbClr val="E7F0F3"/>
+                </a:solidFill>
+                <a:latin typeface="Arial"/>
+              </a:rPr>
+              <a:t>film speed v  (m/s)</a:t>
+            </a:r>
+          </a:p>
+        </p:txBody>
+      </p:sp>
+      <p:sp>
+        <p:nvSpPr>
+          <p:cNvPr id="29" name="C4-E33 text 27" descr="sci-ppt:o027"/>
+          <p:cNvSpPr txBox="1"/>
+          <p:nvPr/>
+        </p:nvSpPr>
+        <p:spPr>
+          <a:xfrm>
+            <a:off x="365760" y="1481328"/>
+            <a:ext cx="5852160" cy="231648"/>
+          </a:xfrm>
+          <a:prstGeom prst="rect">
+            <a:avLst/>
+          </a:prstGeom>
+          <a:noFill/>
+          <a:effectLst/>
+        </p:spPr>
+        <p:txBody>
+          <a:bodyPr wrap="none" lIns="18288" rIns="18288" tIns="18288" bIns="18288" anchor="t">
             <a:spAutoFit/>
           </a:bodyPr>
           <a:lstStyle/>
@@ -3491,27 +3899,443 @@
               </a:spcAft>
             </a:pPr>
             <a:r>
-              <a:rPr sz="1150" b="0" i="0">
+              <a:rPr sz="1200" b="0" i="0">
                 <a:solidFill>
-                  <a:srgbClr val="B4C7D2"/>
+                  <a:srgbClr val="E7F0F3"/>
                 </a:solidFill>
                 <a:latin typeface="Arial"/>
               </a:rPr>
-              <a:t>• I_net → final payload momentum</a:t>
-            </a:r>
-          </a:p>
-        </p:txBody>
-      </p:sp>
-      <p:sp>
-        <p:nvSpPr>
-          <p:cNvPr id="14" name="C4-E33 text 12" descr="sci-ppt:o012"/>
+              <a:t>energy  (nJ)</a:t>
+            </a:r>
+          </a:p>
+        </p:txBody>
+      </p:sp>
+      <p:sp>
+        <p:nvSpPr>
+          <p:cNvPr id="30" name="C4-E33 polygon 28" descr="sci-ppt:o028"/>
+          <p:cNvSpPr/>
+          <p:nvPr/>
+        </p:nvSpPr>
+        <p:spPr>
+          <a:xfrm>
+            <a:off x="914400" y="3167170"/>
+            <a:ext cx="5852160" cy="421850"/>
+          </a:xfrm>
+          <a:custGeom>
+            <a:avLst/>
+            <a:gdLst/>
+            <a:ahLst/>
+            <a:cxnLst/>
+            <a:rect l="l" t="t" r="r" b="b"/>
+            <a:pathLst>
+              <a:path w="5852160" h="421850">
+                <a:moveTo>
+                  <a:pt x="0" y="421850"/>
+                </a:moveTo>
+                <a:lnTo>
+                  <a:pt x="59112" y="421806"/>
+                </a:lnTo>
+                <a:lnTo>
+                  <a:pt x="118225" y="421677"/>
+                </a:lnTo>
+                <a:lnTo>
+                  <a:pt x="177338" y="421462"/>
+                </a:lnTo>
+                <a:lnTo>
+                  <a:pt x="236450" y="421161"/>
+                </a:lnTo>
+                <a:lnTo>
+                  <a:pt x="295563" y="420773"/>
+                </a:lnTo>
+                <a:lnTo>
+                  <a:pt x="354676" y="420300"/>
+                </a:lnTo>
+                <a:lnTo>
+                  <a:pt x="413789" y="419740"/>
+                </a:lnTo>
+                <a:lnTo>
+                  <a:pt x="472901" y="419095"/>
+                </a:lnTo>
+                <a:lnTo>
+                  <a:pt x="532014" y="418363"/>
+                </a:lnTo>
+                <a:lnTo>
+                  <a:pt x="591127" y="417545"/>
+                </a:lnTo>
+                <a:lnTo>
+                  <a:pt x="650240" y="416641"/>
+                </a:lnTo>
+                <a:lnTo>
+                  <a:pt x="709352" y="415652"/>
+                </a:lnTo>
+                <a:lnTo>
+                  <a:pt x="768465" y="414575"/>
+                </a:lnTo>
+                <a:lnTo>
+                  <a:pt x="827578" y="413413"/>
+                </a:lnTo>
+                <a:lnTo>
+                  <a:pt x="886690" y="412165"/>
+                </a:lnTo>
+                <a:lnTo>
+                  <a:pt x="945803" y="410831"/>
+                </a:lnTo>
+                <a:lnTo>
+                  <a:pt x="1004916" y="409411"/>
+                </a:lnTo>
+                <a:lnTo>
+                  <a:pt x="1064029" y="407904"/>
+                </a:lnTo>
+                <a:lnTo>
+                  <a:pt x="1123141" y="406312"/>
+                </a:lnTo>
+                <a:lnTo>
+                  <a:pt x="1182254" y="404633"/>
+                </a:lnTo>
+                <a:lnTo>
+                  <a:pt x="1241367" y="402868"/>
+                </a:lnTo>
+                <a:lnTo>
+                  <a:pt x="1300480" y="401017"/>
+                </a:lnTo>
+                <a:lnTo>
+                  <a:pt x="1359592" y="399081"/>
+                </a:lnTo>
+                <a:lnTo>
+                  <a:pt x="1418705" y="397058"/>
+                </a:lnTo>
+                <a:lnTo>
+                  <a:pt x="1477818" y="394949"/>
+                </a:lnTo>
+                <a:lnTo>
+                  <a:pt x="1536930" y="392753"/>
+                </a:lnTo>
+                <a:lnTo>
+                  <a:pt x="1596043" y="390472"/>
+                </a:lnTo>
+                <a:lnTo>
+                  <a:pt x="1655156" y="388105"/>
+                </a:lnTo>
+                <a:lnTo>
+                  <a:pt x="1714269" y="385652"/>
+                </a:lnTo>
+                <a:lnTo>
+                  <a:pt x="1773381" y="383112"/>
+                </a:lnTo>
+                <a:lnTo>
+                  <a:pt x="1832494" y="380487"/>
+                </a:lnTo>
+                <a:lnTo>
+                  <a:pt x="1891607" y="377775"/>
+                </a:lnTo>
+                <a:lnTo>
+                  <a:pt x="1950720" y="374977"/>
+                </a:lnTo>
+                <a:lnTo>
+                  <a:pt x="2009832" y="372094"/>
+                </a:lnTo>
+                <a:lnTo>
+                  <a:pt x="2068945" y="369124"/>
+                </a:lnTo>
+                <a:lnTo>
+                  <a:pt x="2128058" y="366068"/>
+                </a:lnTo>
+                <a:lnTo>
+                  <a:pt x="2187170" y="362926"/>
+                </a:lnTo>
+                <a:lnTo>
+                  <a:pt x="2246283" y="359698"/>
+                </a:lnTo>
+                <a:lnTo>
+                  <a:pt x="2305396" y="356383"/>
+                </a:lnTo>
+                <a:lnTo>
+                  <a:pt x="2364509" y="352983"/>
+                </a:lnTo>
+                <a:lnTo>
+                  <a:pt x="2423621" y="349497"/>
+                </a:lnTo>
+                <a:lnTo>
+                  <a:pt x="2482734" y="345924"/>
+                </a:lnTo>
+                <a:lnTo>
+                  <a:pt x="2541847" y="342266"/>
+                </a:lnTo>
+                <a:lnTo>
+                  <a:pt x="2600960" y="338521"/>
+                </a:lnTo>
+                <a:lnTo>
+                  <a:pt x="2660072" y="334691"/>
+                </a:lnTo>
+                <a:lnTo>
+                  <a:pt x="2719185" y="330774"/>
+                </a:lnTo>
+                <a:lnTo>
+                  <a:pt x="2778298" y="326771"/>
+                </a:lnTo>
+                <a:lnTo>
+                  <a:pt x="2837410" y="322682"/>
+                </a:lnTo>
+                <a:lnTo>
+                  <a:pt x="2896523" y="318507"/>
+                </a:lnTo>
+                <a:lnTo>
+                  <a:pt x="2955636" y="314246"/>
+                </a:lnTo>
+                <a:lnTo>
+                  <a:pt x="3014749" y="309899"/>
+                </a:lnTo>
+                <a:lnTo>
+                  <a:pt x="3073861" y="305465"/>
+                </a:lnTo>
+                <a:lnTo>
+                  <a:pt x="3132974" y="300946"/>
+                </a:lnTo>
+                <a:lnTo>
+                  <a:pt x="3192087" y="296341"/>
+                </a:lnTo>
+                <a:lnTo>
+                  <a:pt x="3251200" y="291649"/>
+                </a:lnTo>
+                <a:lnTo>
+                  <a:pt x="3310312" y="286871"/>
+                </a:lnTo>
+                <a:lnTo>
+                  <a:pt x="3369425" y="282008"/>
+                </a:lnTo>
+                <a:lnTo>
+                  <a:pt x="3428538" y="277058"/>
+                </a:lnTo>
+                <a:lnTo>
+                  <a:pt x="3487650" y="272022"/>
+                </a:lnTo>
+                <a:lnTo>
+                  <a:pt x="3546763" y="266900"/>
+                </a:lnTo>
+                <a:lnTo>
+                  <a:pt x="3605876" y="261692"/>
+                </a:lnTo>
+                <a:lnTo>
+                  <a:pt x="3664989" y="256398"/>
+                </a:lnTo>
+                <a:lnTo>
+                  <a:pt x="3724101" y="251018"/>
+                </a:lnTo>
+                <a:lnTo>
+                  <a:pt x="3783214" y="245552"/>
+                </a:lnTo>
+                <a:lnTo>
+                  <a:pt x="3842327" y="239999"/>
+                </a:lnTo>
+                <a:lnTo>
+                  <a:pt x="3901440" y="234361"/>
+                </a:lnTo>
+                <a:lnTo>
+                  <a:pt x="3960552" y="228636"/>
+                </a:lnTo>
+                <a:lnTo>
+                  <a:pt x="4019665" y="222826"/>
+                </a:lnTo>
+                <a:lnTo>
+                  <a:pt x="4078778" y="216929"/>
+                </a:lnTo>
+                <a:lnTo>
+                  <a:pt x="4137890" y="210946"/>
+                </a:lnTo>
+                <a:lnTo>
+                  <a:pt x="4197003" y="204878"/>
+                </a:lnTo>
+                <a:lnTo>
+                  <a:pt x="4256116" y="198723"/>
+                </a:lnTo>
+                <a:lnTo>
+                  <a:pt x="4315229" y="192482"/>
+                </a:lnTo>
+                <a:lnTo>
+                  <a:pt x="4374341" y="186154"/>
+                </a:lnTo>
+                <a:lnTo>
+                  <a:pt x="4433454" y="179741"/>
+                </a:lnTo>
+                <a:lnTo>
+                  <a:pt x="4492567" y="173242"/>
+                </a:lnTo>
+                <a:lnTo>
+                  <a:pt x="4551680" y="166657"/>
+                </a:lnTo>
+                <a:lnTo>
+                  <a:pt x="4610792" y="159985"/>
+                </a:lnTo>
+                <a:lnTo>
+                  <a:pt x="4669905" y="153228"/>
+                </a:lnTo>
+                <a:lnTo>
+                  <a:pt x="4729018" y="146384"/>
+                </a:lnTo>
+                <a:lnTo>
+                  <a:pt x="4788130" y="139455"/>
+                </a:lnTo>
+                <a:lnTo>
+                  <a:pt x="4847243" y="132439"/>
+                </a:lnTo>
+                <a:lnTo>
+                  <a:pt x="4906356" y="125337"/>
+                </a:lnTo>
+                <a:lnTo>
+                  <a:pt x="4965469" y="118149"/>
+                </a:lnTo>
+                <a:lnTo>
+                  <a:pt x="5024581" y="110875"/>
+                </a:lnTo>
+                <a:lnTo>
+                  <a:pt x="5083694" y="103515"/>
+                </a:lnTo>
+                <a:lnTo>
+                  <a:pt x="5142807" y="96069"/>
+                </a:lnTo>
+                <a:lnTo>
+                  <a:pt x="5201920" y="88536"/>
+                </a:lnTo>
+                <a:lnTo>
+                  <a:pt x="5261032" y="80918"/>
+                </a:lnTo>
+                <a:lnTo>
+                  <a:pt x="5320145" y="73214"/>
+                </a:lnTo>
+                <a:lnTo>
+                  <a:pt x="5379258" y="65423"/>
+                </a:lnTo>
+                <a:lnTo>
+                  <a:pt x="5438370" y="57547"/>
+                </a:lnTo>
+                <a:lnTo>
+                  <a:pt x="5497483" y="49584"/>
+                </a:lnTo>
+                <a:lnTo>
+                  <a:pt x="5556596" y="41535"/>
+                </a:lnTo>
+                <a:lnTo>
+                  <a:pt x="5615709" y="33400"/>
+                </a:lnTo>
+                <a:lnTo>
+                  <a:pt x="5674821" y="25179"/>
+                </a:lnTo>
+                <a:lnTo>
+                  <a:pt x="5733934" y="16872"/>
+                </a:lnTo>
+                <a:lnTo>
+                  <a:pt x="5793047" y="8479"/>
+                </a:lnTo>
+                <a:lnTo>
+                  <a:pt x="5852160" y="0"/>
+                </a:lnTo>
+              </a:path>
+            </a:pathLst>
+          </a:custGeom>
+          <a:noFill/>
+          <a:ln w="38100">
+            <a:solidFill>
+              <a:srgbClr val="8EDBD4"/>
+            </a:solidFill>
+          </a:ln>
+          <a:effectLst/>
+        </p:spPr>
+        <p:txBody>
+          <a:bodyPr rtlCol="0" anchor="ctr"/>
+          <a:lstStyle/>
+          <a:p>
+            <a:pPr algn="ctr"/>
+          </a:p>
+        </p:txBody>
+      </p:sp>
+      <p:cxnSp>
+        <p:nvCxnSpPr>
+          <p:cNvPr id="31" name="C4-E33 line 29" descr="sci-ppt:o029"/>
+          <p:cNvCxnSpPr/>
+          <p:nvPr/>
+        </p:nvCxnSpPr>
+        <p:spPr>
+          <a:xfrm>
+            <a:off x="914400" y="2331719"/>
+            <a:ext cx="5852160" cy="0"/>
+          </a:xfrm>
+          <a:prstGeom prst="line">
+            <a:avLst/>
+          </a:prstGeom>
+          <a:ln w="16510">
+            <a:solidFill>
+              <a:srgbClr val="F2B880"/>
+            </a:solidFill>
+            <a:prstDash val="dash"/>
+          </a:ln>
+          <a:effectLst/>
+        </p:spPr>
+      </p:cxnSp>
+      <p:cxnSp>
+        <p:nvCxnSpPr>
+          <p:cNvPr id="32" name="C4-E33 line 30" descr="sci-ppt:o030"/>
+          <p:cNvCxnSpPr/>
+          <p:nvPr/>
+        </p:nvCxnSpPr>
+        <p:spPr>
+          <a:xfrm>
+            <a:off x="4193457" y="1828800"/>
+            <a:ext cx="0" cy="3017520"/>
+          </a:xfrm>
+          <a:prstGeom prst="line">
+            <a:avLst/>
+          </a:prstGeom>
+          <a:ln w="16510">
+            <a:solidFill>
+              <a:srgbClr val="F28BA0"/>
+            </a:solidFill>
+            <a:prstDash val="dash"/>
+          </a:ln>
+          <a:effectLst/>
+        </p:spPr>
+      </p:cxnSp>
+      <p:sp>
+        <p:nvSpPr>
+          <p:cNvPr id="33" name="C4-E33 ellipse 31" descr="sci-ppt:o031"/>
+          <p:cNvSpPr/>
+          <p:nvPr/>
+        </p:nvSpPr>
+        <p:spPr>
+          <a:xfrm>
+            <a:off x="4120305" y="3383426"/>
+            <a:ext cx="146304" cy="146304"/>
+          </a:xfrm>
+          <a:prstGeom prst="ellipse">
+            <a:avLst/>
+          </a:prstGeom>
+          <a:solidFill>
+            <a:srgbClr val="8EDBD4"/>
+          </a:solidFill>
+          <a:ln w="12700">
+            <a:solidFill>
+              <a:srgbClr val="8EDBD4"/>
+            </a:solidFill>
+          </a:ln>
+          <a:effectLst/>
+        </p:spPr>
+        <p:txBody>
+          <a:bodyPr rtlCol="0" anchor="ctr"/>
+          <a:lstStyle/>
+          <a:p>
+            <a:pPr algn="ctr"/>
+          </a:p>
+        </p:txBody>
+      </p:sp>
+      <p:sp>
+        <p:nvSpPr>
+          <p:cNvPr id="34" name="C4-E33 text 32" descr="sci-ppt:o032"/>
           <p:cNvSpPr txBox="1"/>
           <p:nvPr/>
         </p:nvSpPr>
         <p:spPr>
           <a:xfrm>
-            <a:off x="6217920" y="4096512"/>
-            <a:ext cx="5715000" cy="246888"/>
+            <a:off x="1907457" y="2907938"/>
+            <a:ext cx="2194560" cy="223900"/>
           </a:xfrm>
           <a:prstGeom prst="rect">
             <a:avLst/>
@@ -3520,207 +4344,7 @@
           <a:effectLst/>
         </p:spPr>
         <p:txBody>
-          <a:bodyPr wrap="square" lIns="27432" rIns="27432" tIns="18288" bIns="18288" anchor="ctr">
-            <a:spAutoFit/>
-          </a:bodyPr>
-          <a:lstStyle/>
-          <a:p>
-            <a:pPr algn="l">
-              <a:spcAft>
-                <a:spcPts val="0"/>
-              </a:spcAft>
-            </a:pPr>
-            <a:r>
-              <a:rPr sz="1150" b="0" i="0">
-                <a:solidFill>
-                  <a:srgbClr val="B4C7D2"/>
-                </a:solidFill>
-                <a:latin typeface="Arial"/>
-              </a:rPr>
-              <a:t>• m_f → v_CM = 0.67238 m/s</a:t>
-            </a:r>
-          </a:p>
-        </p:txBody>
-      </p:sp>
-      <p:sp>
-        <p:nvSpPr>
-          <p:cNvPr id="15" name="C4-E33 text 13" descr="sci-ppt:o013"/>
-          <p:cNvSpPr txBox="1"/>
-          <p:nvPr/>
-        </p:nvSpPr>
-        <p:spPr>
-          <a:xfrm>
-            <a:off x="320040" y="4329684"/>
-            <a:ext cx="5715000" cy="246888"/>
-          </a:xfrm>
-          <a:prstGeom prst="rect">
-            <a:avLst/>
-          </a:prstGeom>
-          <a:noFill/>
-          <a:effectLst/>
-        </p:spPr>
-        <p:txBody>
-          <a:bodyPr wrap="square" lIns="27432" rIns="27432" tIns="18288" bIns="18288" anchor="ctr">
-            <a:spAutoFit/>
-          </a:bodyPr>
-          <a:lstStyle/>
-          <a:p>
-            <a:pPr algn="l">
-              <a:spcAft>
-                <a:spcPts val="0"/>
-              </a:spcAft>
-            </a:pPr>
-            <a:r>
-              <a:rPr sz="1150" b="0" i="0">
-                <a:solidFill>
-                  <a:srgbClr val="B4C7D2"/>
-                </a:solidFill>
-                <a:latin typeface="Arial"/>
-              </a:rPr>
-              <a:t>• K_CM = 0.52669 nJ</a:t>
-            </a:r>
-          </a:p>
-        </p:txBody>
-      </p:sp>
-      <p:sp>
-        <p:nvSpPr>
-          <p:cNvPr id="16" name="C4-E33 text 14" descr="sci-ppt:o014"/>
-          <p:cNvSpPr txBox="1"/>
-          <p:nvPr/>
-        </p:nvSpPr>
-        <p:spPr>
-          <a:xfrm>
-            <a:off x="6217920" y="4329684"/>
-            <a:ext cx="5715000" cy="246888"/>
-          </a:xfrm>
-          <a:prstGeom prst="rect">
-            <a:avLst/>
-          </a:prstGeom>
-          <a:noFill/>
-          <a:effectLst/>
-        </p:spPr>
-        <p:txBody>
-          <a:bodyPr wrap="square" lIns="27432" rIns="27432" tIns="18288" bIns="18288" anchor="ctr">
-            <a:spAutoFit/>
-          </a:bodyPr>
-          <a:lstStyle/>
-          <a:p>
-            <a:pPr algn="l">
-              <a:spcAft>
-                <a:spcPts val="0"/>
-              </a:spcAft>
-            </a:pPr>
-            <a:r>
-              <a:rPr sz="1150" b="0" i="0">
-                <a:solidFill>
-                  <a:srgbClr val="B4C7D2"/>
-                </a:solidFill>
-                <a:latin typeface="Arial"/>
-              </a:rPr>
-              <a:t>• ΓA_f = 5 nJ</a:t>
-            </a:r>
-          </a:p>
-        </p:txBody>
-      </p:sp>
-      <p:sp>
-        <p:nvSpPr>
-          <p:cNvPr id="17" name="C4-E33 text 15" descr="sci-ppt:o015"/>
-          <p:cNvSpPr txBox="1"/>
-          <p:nvPr/>
-        </p:nvSpPr>
-        <p:spPr>
-          <a:xfrm>
-            <a:off x="320040" y="4562856"/>
-            <a:ext cx="5715000" cy="246888"/>
-          </a:xfrm>
-          <a:prstGeom prst="rect">
-            <a:avLst/>
-          </a:prstGeom>
-          <a:noFill/>
-          <a:effectLst/>
-        </p:spPr>
-        <p:txBody>
-          <a:bodyPr wrap="square" lIns="27432" rIns="27432" tIns="18288" bIns="18288" anchor="ctr">
-            <a:spAutoFit/>
-          </a:bodyPr>
-          <a:lstStyle/>
-          <a:p>
-            <a:pPr algn="l">
-              <a:spcAft>
-                <a:spcPts val="0"/>
-              </a:spcAft>
-            </a:pPr>
-            <a:r>
-              <a:rPr sz="1150" b="0" i="0">
-                <a:solidFill>
-                  <a:srgbClr val="B4C7D2"/>
-                </a:solidFill>
-                <a:latin typeface="Arial"/>
-              </a:rPr>
-              <a:t>• total minimum = 5.52669 nJ</a:t>
-            </a:r>
-          </a:p>
-        </p:txBody>
-      </p:sp>
-      <p:sp>
-        <p:nvSpPr>
-          <p:cNvPr id="18" name="C4-E33 text 16" descr="sci-ppt:o016"/>
-          <p:cNvSpPr txBox="1"/>
-          <p:nvPr/>
-        </p:nvSpPr>
-        <p:spPr>
-          <a:xfrm>
-            <a:off x="6217920" y="4562856"/>
-            <a:ext cx="5715000" cy="246888"/>
-          </a:xfrm>
-          <a:prstGeom prst="rect">
-            <a:avLst/>
-          </a:prstGeom>
-          <a:noFill/>
-          <a:effectLst/>
-        </p:spPr>
-        <p:txBody>
-          <a:bodyPr wrap="square" lIns="27432" rIns="27432" tIns="18288" bIns="18288" anchor="ctr">
-            <a:spAutoFit/>
-          </a:bodyPr>
-          <a:lstStyle/>
-          <a:p>
-            <a:pPr algn="l">
-              <a:spcAft>
-                <a:spcPts val="0"/>
-              </a:spcAft>
-            </a:pPr>
-            <a:r>
-              <a:rPr sz="1150" b="0" i="0">
-                <a:solidFill>
-                  <a:srgbClr val="B4C7D2"/>
-                </a:solidFill>
-                <a:latin typeface="Arial"/>
-              </a:rPr>
-              <a:t>• E_solid = 10 nJ</a:t>
-            </a:r>
-          </a:p>
-        </p:txBody>
-      </p:sp>
-      <p:sp>
-        <p:nvSpPr>
-          <p:cNvPr id="19" name="C4-E33 text 17" descr="sci-ppt:o017"/>
-          <p:cNvSpPr txBox="1"/>
-          <p:nvPr/>
-        </p:nvSpPr>
-        <p:spPr>
-          <a:xfrm>
-            <a:off x="320040" y="5596128"/>
-            <a:ext cx="11430000" cy="292608"/>
-          </a:xfrm>
-          <a:prstGeom prst="rect">
-            <a:avLst/>
-          </a:prstGeom>
-          <a:noFill/>
-          <a:effectLst/>
-        </p:spPr>
-        <p:txBody>
-          <a:bodyPr wrap="square" lIns="27432" rIns="27432" tIns="18288" bIns="18288" anchor="ctr">
+          <a:bodyPr wrap="none" lIns="18288" rIns="18288" tIns="18288" bIns="18288" anchor="t">
             <a:spAutoFit/>
           </a:bodyPr>
           <a:lstStyle/>
@@ -3737,21 +4361,21 @@
                 </a:solidFill>
                 <a:latin typeface="Arial"/>
               </a:rPr>
-              <a:t>An exact actual impulse fixes the centre-of-mass speed.</a:t>
-            </a:r>
-          </a:p>
-        </p:txBody>
-      </p:sp>
-      <p:sp>
-        <p:nvSpPr>
-          <p:cNvPr id="20" name="C4-E33 text 18" descr="sci-ppt:o018"/>
+              <a:t>5.527 nJ at v_CM</a:t>
+            </a:r>
+          </a:p>
+        </p:txBody>
+      </p:sp>
+      <p:sp>
+        <p:nvSpPr>
+          <p:cNvPr id="35" name="C4-E33 text 33" descr="sci-ppt:o033"/>
           <p:cNvSpPr txBox="1"/>
           <p:nvPr/>
         </p:nvSpPr>
         <p:spPr>
           <a:xfrm>
-            <a:off x="320040" y="6473952"/>
-            <a:ext cx="11430000" cy="256032"/>
+            <a:off x="1231392" y="1929384"/>
+            <a:ext cx="1645920" cy="223900"/>
           </a:xfrm>
           <a:prstGeom prst="rect">
             <a:avLst/>
@@ -3760,7 +4384,375 @@
           <a:effectLst/>
         </p:spPr>
         <p:txBody>
-          <a:bodyPr wrap="square" lIns="27432" rIns="27432" tIns="18288" bIns="18288" anchor="ctr">
+          <a:bodyPr wrap="none" lIns="18288" rIns="18288" tIns="18288" bIns="18288" anchor="t">
+            <a:spAutoFit/>
+          </a:bodyPr>
+          <a:lstStyle/>
+          <a:p>
+            <a:pPr algn="l">
+              <a:spcAft>
+                <a:spcPts val="0"/>
+              </a:spcAft>
+            </a:pPr>
+            <a:r>
+              <a:rPr sz="1150" b="0" i="0">
+                <a:solidFill>
+                  <a:srgbClr val="F2B880"/>
+                </a:solidFill>
+                <a:latin typeface="Arial"/>
+              </a:rPr>
+              <a:t>E_solid = 10 nJ</a:t>
+            </a:r>
+          </a:p>
+        </p:txBody>
+      </p:sp>
+      <p:sp>
+        <p:nvSpPr>
+          <p:cNvPr id="36" name="C4-E33 text 34" descr="sci-ppt:o034"/>
+          <p:cNvSpPr txBox="1"/>
+          <p:nvPr/>
+        </p:nvSpPr>
+        <p:spPr>
+          <a:xfrm>
+            <a:off x="4284897" y="4377690"/>
+            <a:ext cx="2743200" cy="223900"/>
+          </a:xfrm>
+          <a:prstGeom prst="rect">
+            <a:avLst/>
+          </a:prstGeom>
+          <a:noFill/>
+          <a:effectLst/>
+        </p:spPr>
+        <p:txBody>
+          <a:bodyPr wrap="none" lIns="18288" rIns="18288" tIns="18288" bIns="18288" anchor="t">
+            <a:spAutoFit/>
+          </a:bodyPr>
+          <a:lstStyle/>
+          <a:p>
+            <a:pPr algn="l">
+              <a:spcAft>
+                <a:spcPts val="0"/>
+              </a:spcAft>
+            </a:pPr>
+            <a:r>
+              <a:rPr sz="1150" b="0" i="0">
+                <a:solidFill>
+                  <a:srgbClr val="F28BA0"/>
+                </a:solidFill>
+                <a:latin typeface="Arial"/>
+              </a:rPr>
+              <a:t>v_CM = Iₙₑₜ/m_f = 0.6724 m/s</a:t>
+            </a:r>
+          </a:p>
+        </p:txBody>
+      </p:sp>
+      <p:sp>
+        <p:nvSpPr>
+          <p:cNvPr id="37" name="C4-E33 round_rect 35" descr="sci-ppt:o035"/>
+          <p:cNvSpPr/>
+          <p:nvPr/>
+        </p:nvSpPr>
+        <p:spPr>
+          <a:xfrm>
+            <a:off x="7040880" y="1463040"/>
+            <a:ext cx="4800600" cy="3566160"/>
+          </a:xfrm>
+          <a:prstGeom prst="roundRect">
+            <a:avLst/>
+          </a:prstGeom>
+          <a:solidFill>
+            <a:srgbClr val="213E4B"/>
+          </a:solidFill>
+          <a:ln w="20320">
+            <a:solidFill>
+              <a:srgbClr val="8EDBD4"/>
+            </a:solidFill>
+          </a:ln>
+          <a:effectLst/>
+        </p:spPr>
+        <p:txBody>
+          <a:bodyPr rtlCol="0" anchor="ctr"/>
+          <a:lstStyle/>
+          <a:p>
+            <a:pPr algn="ctr"/>
+          </a:p>
+        </p:txBody>
+      </p:sp>
+      <p:sp>
+        <p:nvSpPr>
+          <p:cNvPr id="38" name="C4-E33 text 36" descr="sci-ppt:o036"/>
+          <p:cNvSpPr txBox="1"/>
+          <p:nvPr/>
+        </p:nvSpPr>
+        <p:spPr>
+          <a:xfrm>
+            <a:off x="7150608" y="1517904"/>
+            <a:ext cx="4581144" cy="254889"/>
+          </a:xfrm>
+          <a:prstGeom prst="rect">
+            <a:avLst/>
+          </a:prstGeom>
+          <a:noFill/>
+          <a:effectLst/>
+        </p:spPr>
+        <p:txBody>
+          <a:bodyPr wrap="none" lIns="18288" rIns="18288" tIns="18288" bIns="18288" anchor="t">
+            <a:spAutoFit/>
+          </a:bodyPr>
+          <a:lstStyle/>
+          <a:p>
+            <a:pPr algn="l">
+              <a:spcAft>
+                <a:spcPts val="0"/>
+              </a:spcAft>
+            </a:pPr>
+            <a:r>
+              <a:rPr sz="1350" b="1" i="0">
+                <a:solidFill>
+                  <a:srgbClr val="8EDBD4"/>
+                </a:solidFill>
+                <a:latin typeface="Arial"/>
+              </a:rPr>
+              <a:t>Implied speed and energy</a:t>
+            </a:r>
+          </a:p>
+        </p:txBody>
+      </p:sp>
+      <p:sp>
+        <p:nvSpPr>
+          <p:cNvPr id="39" name="C4-E33 text 37" descr="sci-ppt:o037"/>
+          <p:cNvSpPr txBox="1"/>
+          <p:nvPr/>
+        </p:nvSpPr>
+        <p:spPr>
+          <a:xfrm>
+            <a:off x="7178040" y="1920240"/>
+            <a:ext cx="4572000" cy="231648"/>
+          </a:xfrm>
+          <a:prstGeom prst="rect">
+            <a:avLst/>
+          </a:prstGeom>
+          <a:noFill/>
+          <a:effectLst/>
+        </p:spPr>
+        <p:txBody>
+          <a:bodyPr wrap="none" lIns="18288" rIns="18288" tIns="18288" bIns="18288" anchor="t">
+            <a:spAutoFit/>
+          </a:bodyPr>
+          <a:lstStyle/>
+          <a:p>
+            <a:pPr algn="l">
+              <a:spcAft>
+                <a:spcPts val="0"/>
+              </a:spcAft>
+            </a:pPr>
+            <a:r>
+              <a:rPr sz="1200" b="1" i="0">
+                <a:solidFill>
+                  <a:srgbClr val="E7F0F3"/>
+                </a:solidFill>
+                <a:latin typeface="Arial"/>
+              </a:rPr>
+              <a:t>v_CM = Iₙₑₜ / m_f = 0.672378829 m/s</a:t>
+            </a:r>
+          </a:p>
+        </p:txBody>
+      </p:sp>
+      <p:sp>
+        <p:nvSpPr>
+          <p:cNvPr id="40" name="C4-E33 text 38" descr="sci-ppt:o038"/>
+          <p:cNvSpPr txBox="1"/>
+          <p:nvPr/>
+        </p:nvSpPr>
+        <p:spPr>
+          <a:xfrm>
+            <a:off x="7178040" y="2423160"/>
+            <a:ext cx="4572000" cy="231648"/>
+          </a:xfrm>
+          <a:prstGeom prst="rect">
+            <a:avLst/>
+          </a:prstGeom>
+          <a:noFill/>
+          <a:effectLst/>
+        </p:spPr>
+        <p:txBody>
+          <a:bodyPr wrap="none" lIns="18288" rIns="18288" tIns="18288" bIns="18288" anchor="t">
+            <a:spAutoFit/>
+          </a:bodyPr>
+          <a:lstStyle/>
+          <a:p>
+            <a:pPr algn="l">
+              <a:spcAft>
+                <a:spcPts val="0"/>
+              </a:spcAft>
+            </a:pPr>
+            <a:r>
+              <a:rPr sz="1200" b="1" i="0">
+                <a:solidFill>
+                  <a:srgbClr val="E7F0F3"/>
+                </a:solidFill>
+                <a:latin typeface="Arial"/>
+              </a:rPr>
+              <a:t>K_CM = Iₙₑₜ² / (2 m_f) = 0.526688683 nJ</a:t>
+            </a:r>
+          </a:p>
+        </p:txBody>
+      </p:sp>
+      <p:sp>
+        <p:nvSpPr>
+          <p:cNvPr id="41" name="C4-E33 text 39" descr="sci-ppt:o039"/>
+          <p:cNvSpPr txBox="1"/>
+          <p:nvPr/>
+        </p:nvSpPr>
+        <p:spPr>
+          <a:xfrm>
+            <a:off x="7178040" y="2926080"/>
+            <a:ext cx="4572000" cy="231648"/>
+          </a:xfrm>
+          <a:prstGeom prst="rect">
+            <a:avLst/>
+          </a:prstGeom>
+          <a:noFill/>
+          <a:effectLst/>
+        </p:spPr>
+        <p:txBody>
+          <a:bodyPr wrap="none" lIns="18288" rIns="18288" tIns="18288" bIns="18288" anchor="t">
+            <a:spAutoFit/>
+          </a:bodyPr>
+          <a:lstStyle/>
+          <a:p>
+            <a:pPr algn="l">
+              <a:spcAft>
+                <a:spcPts val="0"/>
+              </a:spcAft>
+            </a:pPr>
+            <a:r>
+              <a:rPr sz="1200" b="1" i="0">
+                <a:solidFill>
+                  <a:srgbClr val="F2B880"/>
+                </a:solidFill>
+                <a:latin typeface="Arial"/>
+              </a:rPr>
+              <a:t>Γ A_f + K_CM = 5.526688683 nJ  &lt;  E_solid</a:t>
+            </a:r>
+          </a:p>
+        </p:txBody>
+      </p:sp>
+      <p:sp>
+        <p:nvSpPr>
+          <p:cNvPr id="42" name="C4-E33 text 40" descr="sci-ppt:o040"/>
+          <p:cNvSpPr txBox="1"/>
+          <p:nvPr/>
+        </p:nvSpPr>
+        <p:spPr>
+          <a:xfrm>
+            <a:off x="7178040" y="3611880"/>
+            <a:ext cx="4572000" cy="417576"/>
+          </a:xfrm>
+          <a:prstGeom prst="rect">
+            <a:avLst/>
+          </a:prstGeom>
+          <a:noFill/>
+          <a:effectLst/>
+        </p:spPr>
+        <p:txBody>
+          <a:bodyPr wrap="none" lIns="18288" rIns="18288" tIns="18288" bIns="18288" anchor="t">
+            <a:spAutoFit/>
+          </a:bodyPr>
+          <a:lstStyle/>
+          <a:p>
+            <a:pPr algn="l">
+              <a:spcAft>
+                <a:spcPts val="0"/>
+              </a:spcAft>
+            </a:pPr>
+            <a:r>
+              <a:rPr sz="1200" b="0" i="0">
+                <a:solidFill>
+                  <a:srgbClr val="B4C7D2"/>
+                </a:solidFill>
+                <a:latin typeface="Arial"/>
+              </a:rPr>
+              <a:t>Check: the impulse budget and low-Γ energy budget agree</a:t>
+            </a:r>
+          </a:p>
+          <a:p>
+            <a:pPr algn="l">
+              <a:spcAft>
+                <a:spcPts val="0"/>
+              </a:spcAft>
+            </a:pPr>
+            <a:r>
+              <a:rPr sz="1200" b="0" i="0">
+                <a:solidFill>
+                  <a:srgbClr val="B4C7D2"/>
+                </a:solidFill>
+                <a:latin typeface="Arial"/>
+              </a:rPr>
+              <a:t>at the implied speed.</a:t>
+            </a:r>
+          </a:p>
+        </p:txBody>
+      </p:sp>
+      <p:sp>
+        <p:nvSpPr>
+          <p:cNvPr id="43" name="C4-E33 text 41" descr="sci-ppt:o041"/>
+          <p:cNvSpPr txBox="1"/>
+          <p:nvPr/>
+        </p:nvSpPr>
+        <p:spPr>
+          <a:xfrm>
+            <a:off x="914400" y="5486400"/>
+            <a:ext cx="10972800" cy="239395"/>
+          </a:xfrm>
+          <a:prstGeom prst="rect">
+            <a:avLst/>
+          </a:prstGeom>
+          <a:noFill/>
+          <a:effectLst/>
+        </p:spPr>
+        <p:txBody>
+          <a:bodyPr wrap="none" lIns="18288" rIns="18288" tIns="18288" bIns="18288" anchor="t">
+            <a:spAutoFit/>
+          </a:bodyPr>
+          <a:lstStyle/>
+          <a:p>
+            <a:pPr algn="l">
+              <a:spcAft>
+                <a:spcPts val="0"/>
+              </a:spcAft>
+            </a:pPr>
+            <a:r>
+              <a:rPr sz="1250" b="0" i="0">
+                <a:solidFill>
+                  <a:srgbClr val="E7F0F3"/>
+                </a:solidFill>
+                <a:latin typeface="Arial"/>
+              </a:rPr>
+              <a:t>Compatibility is a screen: it shows the two budgets do not contradict each other, not that the film actually leaves.</a:t>
+            </a:r>
+          </a:p>
+        </p:txBody>
+      </p:sp>
+      <p:sp>
+        <p:nvSpPr>
+          <p:cNvPr id="44" name="C4-E33 text 42" descr="sci-ppt:o042"/>
+          <p:cNvSpPr txBox="1"/>
+          <p:nvPr/>
+        </p:nvSpPr>
+        <p:spPr>
+          <a:xfrm>
+            <a:off x="320040" y="6510528"/>
+            <a:ext cx="11521440" cy="200660"/>
+          </a:xfrm>
+          <a:prstGeom prst="rect">
+            <a:avLst/>
+          </a:prstGeom>
+          <a:noFill/>
+          <a:effectLst/>
+        </p:spPr>
+        <p:txBody>
+          <a:bodyPr wrap="none" lIns="18288" rIns="18288" tIns="18288" bIns="18288" anchor="t">
             <a:spAutoFit/>
           </a:bodyPr>
           <a:lstStyle/>
@@ -3777,7 +4769,7 @@
                 </a:solidFill>
                 <a:latin typeface="Arial"/>
               </a:rPr>
-              <a:t>Model schematic; geometry is not to scale.</a:t>
+              <a:t>Energy–momentum compatibility of Eq. C4-E33.</a:t>
             </a:r>
           </a:p>
         </p:txBody>
